--- a/resume.pptx
+++ b/resume.pptx
@@ -13,6 +13,7 @@
     <p:sldId id="261" r:id="rId12"/>
     <p:sldId id="262" r:id="rId13"/>
     <p:sldId id="263" r:id="rId14"/>
+    <p:sldId id="264" r:id="rId15"/>
   </p:sldIdLst>
   <p:sldSz cx="9144000" cy="6858000" type="screen4x3"/>
   <p:notesSz cx="6858000" cy="9144000"/>
@@ -3389,7 +3390,7 @@
           <a:lstStyle/>
           <a:p>
             <a:r>
-              <a:t>John Mikael Gundersen</a:t>
+              <a:t>John Mikael Lindbakk</a:t>
             </a:r>
           </a:p>
         </p:txBody>
@@ -3410,7 +3411,7 @@
           <a:lstStyle/>
           <a:p>
             <a:r>
-              <a:t>Tech lead with a foucs on quality and best practices. Has worked within a variety of domains, such as highly sensitive healthcare applications and large-scale banking systems.</a:t>
+              <a:t>Senior backend developer and tech lead who builds robust, maintainable software. Cares about architecture that can evolve, teams that can sustain a pace, and code the next person can actually read. More than 13 years across healthcare, banking and insurance, and since 2023 as a consultant. Does open source and public speaking.</a:t>
             </a:r>
           </a:p>
         </p:txBody>
@@ -3452,7 +3453,7 @@
               <a:defRPr sz="2400"/>
             </a:pPr>
             <a:r>
-              <a:t>Tech Lead@Protector (12.2020-Current)</a:t>
+              <a:t>Senior Consultant@bspoke (05.2023-Current)</a:t>
             </a:r>
           </a:p>
         </p:txBody>
@@ -3477,37 +3478,37 @@
           <a:p>
             <a:pPr lvl="1"/>
             <a:r>
-              <a:t>Built the initialiser which serves as the golden standard within the organisation while also being the fundation of any new application</a:t>
+              <a:t>Architect on a greenfield logistics platform: a modular monolith built with Domain-Driven Design, event sourcing and event-driven integration, delivered by up to three teams</a:t>
             </a:r>
           </a:p>
           <a:p>
             <a:pPr lvl="1"/>
             <a:r>
-              <a:t>Created the system that allows for efficient risk analysis for our reinsurance which can potentially save the business millions in years to come</a:t>
+              <a:t>Team lead and tech lead for the core credit-card systems at a large Nordic IT services company, where I set the test strategy, introduced contract testing and took part in the PCI audit</a:t>
             </a:r>
           </a:p>
           <a:p>
             <a:pPr lvl="1"/>
             <a:r>
-              <a:t>Headed a project which aimed at geolocating risks in the UK where we ended up geolocating +90% of the UK portfolio</a:t>
+              <a:t>Architect for a public health institute's move to a new Azure and Kubernetes platform</a:t>
             </a:r>
           </a:p>
           <a:p>
             <a:pPr lvl="1"/>
             <a:r>
-              <a:t>Headed the adoption of various technologies and practices: OpenAPI, Unit, system and integration testing, Static analysis tools such as SonarCloud, Created the post-mortem process</a:t>
+              <a:t>Brought in at the end of a critical telecom infrastructure project, after its two original developers had left, to do a security audit, fix the remaining bugs and bring it to the finish line</a:t>
             </a:r>
           </a:p>
           <a:p>
             <a:pPr lvl="1"/>
             <a:r>
-              <a:t>Authored developer guidelines. Created the first pipeline implementation for GitHub workflow</a:t>
+              <a:t>Developer on a restaurant ordering platform, building integrations with point-of-sale systems</a:t>
             </a:r>
           </a:p>
           <a:p>
             <a:pPr lvl="1"/>
             <a:r>
-              <a:t>Been part of most major technology decisions taken since I started</a:t>
+              <a:t>Mentored developers, gave internal talks and held technical interviews</a:t>
             </a:r>
           </a:p>
         </p:txBody>
@@ -3549,7 +3550,7 @@
               <a:defRPr sz="2400"/>
             </a:pPr>
             <a:r>
-              <a:t>Senior Consultant@TietoEvry (05.2018-11.2020)</a:t>
+              <a:t>Tech Lead@Protector Forsikring (12.2020-05.2023)</a:t>
             </a:r>
           </a:p>
         </p:txBody>
@@ -3574,37 +3575,43 @@
           <a:p>
             <a:pPr lvl="1"/>
             <a:r>
-              <a:t>Made and maintained core web systems for multiple banks</a:t>
+              <a:t>Tech lead across several teams, responsible for architecture, coaching and how the developers worked day to day</a:t>
             </a:r>
           </a:p>
           <a:p>
             <a:pPr lvl="1"/>
             <a:r>
-              <a:t>Created new systems for integration testing and improved CI/CD pipelines</a:t>
+              <a:t>Owned the test strategy and the CI/CD pipelines, including the move from TeamCity to GitHub Actions</a:t>
             </a:r>
           </a:p>
           <a:p>
             <a:pPr lvl="1"/>
             <a:r>
-              <a:t>Authored developer guidelines for a cleaner and more maintainable codebase</a:t>
+              <a:t>Introduced practices that stuck: post-incident reviews, Architecture Decision Records, self-updating dependencies and DORA metrics</a:t>
             </a:r>
           </a:p>
           <a:p>
             <a:pPr lvl="1"/>
             <a:r>
-              <a:t>Was a team lead managing the team responsible for our PCI compliant systems</a:t>
+              <a:t>Built an initialiser that generates production-ready services, which became the foundation of every new application</a:t>
             </a:r>
           </a:p>
           <a:p>
             <a:pPr lvl="1"/>
             <a:r>
-              <a:t>Was a project architect that guided new banks, while being responsible for the technical aspect of the project</a:t>
+              <a:t>Replaced authorisation logic scattered across codebases with central policies and audit logging</a:t>
             </a:r>
           </a:p>
           <a:p>
             <a:pPr lvl="1"/>
             <a:r>
-              <a:t>Worked closely with partners in India</a:t>
+              <a:t>Led a project that geolocated more than 90% of the insured buildings in the UK, and built the reinsurance application used for risk analysis</a:t>
+            </a:r>
+          </a:p>
+          <a:p>
+            <a:pPr lvl="1"/>
+            <a:r>
+              <a:t>Took part in most major technology decisions during my time there</a:t>
             </a:r>
           </a:p>
         </p:txBody>
@@ -3646,7 +3653,7 @@
               <a:defRPr sz="2400"/>
             </a:pPr>
             <a:r>
-              <a:t>Senior system developer@Aspit (09.2013-05.2018)</a:t>
+              <a:t>Senior Consultant@TietoEvry (05.2018-11.2020)</a:t>
             </a:r>
           </a:p>
         </p:txBody>
@@ -3671,19 +3678,37 @@
           <a:p>
             <a:pPr lvl="1"/>
             <a:r>
-              <a:t>Was responsible for the development of the core product</a:t>
+              <a:t>Built and maintained core backend systems for multiple banks: reporting, integrations and a generic changelog</a:t>
             </a:r>
           </a:p>
           <a:p>
             <a:pPr lvl="1"/>
             <a:r>
-              <a:t>Worked closely with the business by planning and implementing new features</a:t>
+              <a:t>Created automated integration testing that cut a week-long manual test of a bank's core systems to 15 minutes, and improved CI/CD pipelines</a:t>
             </a:r>
           </a:p>
           <a:p>
             <a:pPr lvl="1"/>
             <a:r>
-              <a:t>Worked closely with an outsourcing team in Vietnam</a:t>
+              <a:t>Authored developer guidelines for a cleaner and more maintainable codebase</a:t>
+            </a:r>
+          </a:p>
+          <a:p>
+            <a:pPr lvl="1"/>
+            <a:r>
+              <a:t>Team lead for the team responsible for our PCI compliant systems</a:t>
+            </a:r>
+          </a:p>
+          <a:p>
+            <a:pPr lvl="1"/>
+            <a:r>
+              <a:t>Project architect for new banks joining the platform, responsible for the technical side from sale to delivery</a:t>
+            </a:r>
+          </a:p>
+          <a:p>
+            <a:pPr lvl="1"/>
+            <a:r>
+              <a:t>Worked closely with partners in India</a:t>
             </a:r>
           </a:p>
         </p:txBody>
@@ -3722,10 +3747,101 @@
           <a:lstStyle/>
           <a:p>
             <a:pPr>
+              <a:defRPr sz="2400"/>
+            </a:pPr>
+            <a:r>
+              <a:t>System Developer → Senior System Developer@Aspit (09.2013-04.2018)</a:t>
+            </a:r>
+          </a:p>
+        </p:txBody>
+      </p:sp>
+      <p:sp>
+        <p:nvSpPr>
+          <p:cNvPr id="3" name="Content Placeholder 2"/>
+          <p:cNvSpPr>
+            <a:spLocks noGrp="1"/>
+          </p:cNvSpPr>
+          <p:nvPr>
+            <p:ph idx="1"/>
+          </p:nvPr>
+        </p:nvSpPr>
+        <p:spPr/>
+        <p:txBody>
+          <a:bodyPr>
+            <a:normAutofit/>
+          </a:bodyPr>
+          <a:lstStyle/>
+          <a:p/>
+          <a:p>
+            <a:pPr lvl="1"/>
+            <a:r>
+              <a:t>Responsible for the development of the core product, an electronic health record system</a:t>
+            </a:r>
+          </a:p>
+          <a:p>
+            <a:pPr lvl="1"/>
+            <a:r>
+              <a:t>Team lead: estimated, planned and followed up projects, and gathered requirements from customers</a:t>
+            </a:r>
+          </a:p>
+          <a:p>
+            <a:pPr lvl="1"/>
+            <a:r>
+              <a:t>Built integrations with payment terminals, accounting systems and video chat, and a system for migrating customers between vendors</a:t>
+            </a:r>
+          </a:p>
+          <a:p>
+            <a:pPr lvl="1"/>
+            <a:r>
+              <a:t>Worked closely with the business by planning and implementing new features</a:t>
+            </a:r>
+          </a:p>
+          <a:p>
+            <a:pPr lvl="1"/>
+            <a:r>
+              <a:t>Worked closely with an outsourcing team in Vietnam, and lived there for a few months to do it</a:t>
+            </a:r>
+          </a:p>
+        </p:txBody>
+      </p:sp>
+    </p:spTree>
+  </p:cSld>
+  <p:clrMapOvr>
+    <a:masterClrMapping/>
+  </p:clrMapOvr>
+</p:sld>
+</file>
+
+<file path=ppt/slides/slide6.xml><?xml version="1.0" encoding="utf-8"?>
+<p:sld xmlns:a="http://schemas.openxmlformats.org/drawingml/2006/main" xmlns:p="http://schemas.openxmlformats.org/presentationml/2006/main" xmlns:r="http://schemas.openxmlformats.org/officeDocument/2006/relationships">
+  <p:cSld>
+    <p:spTree>
+      <p:nvGrpSpPr>
+        <p:cNvPr id="1" name=""/>
+        <p:cNvGrpSpPr/>
+        <p:nvPr/>
+      </p:nvGrpSpPr>
+      <p:grpSpPr/>
+      <p:sp>
+        <p:nvSpPr>
+          <p:cNvPr id="2" name="Title 1"/>
+          <p:cNvSpPr>
+            <a:spLocks noGrp="1"/>
+          </p:cNvSpPr>
+          <p:nvPr>
+            <p:ph type="title"/>
+          </p:nvPr>
+        </p:nvSpPr>
+        <p:spPr/>
+        <p:txBody>
+          <a:bodyPr/>
+          <a:lstStyle/>
+          <a:p>
+            <a:pPr>
               <a:defRPr sz="1500"/>
             </a:pPr>
             <a:r>
-              <a:t>Happiness rating before and after John Mikael Gundersen joining a company</a:t>
+              <a:t>Happiness rating before and after John Mikael Lindbakk joining a company</a:t>
             </a:r>
           </a:p>
         </p:txBody>
@@ -3756,7 +3872,7 @@
 </p:sld>
 </file>
 
-<file path=ppt/slides/slide6.xml><?xml version="1.0" encoding="utf-8"?>
+<file path=ppt/slides/slide7.xml><?xml version="1.0" encoding="utf-8"?>
 <p:sld xmlns:a="http://schemas.openxmlformats.org/drawingml/2006/main" xmlns:p="http://schemas.openxmlformats.org/presentationml/2006/main" xmlns:r="http://schemas.openxmlformats.org/officeDocument/2006/relationships">
   <p:cSld>
     <p:spTree>
@@ -3809,7 +3925,7 @@
               <a:defRPr sz="2000"/>
             </a:pPr>
             <a:r>
-              <a:t>Computer Science/Aberystwyth University (08.2010-05.2014)</a:t>
+              <a:t>Computer Science/Aberystwyth University (08.2010-06.2013)</a:t>
             </a:r>
           </a:p>
         </p:txBody>
@@ -3822,7 +3938,7 @@
 </p:sld>
 </file>
 
-<file path=ppt/slides/slide7.xml><?xml version="1.0" encoding="utf-8"?>
+<file path=ppt/slides/slide8.xml><?xml version="1.0" encoding="utf-8"?>
 <p:sld xmlns:a="http://schemas.openxmlformats.org/drawingml/2006/main" xmlns:p="http://schemas.openxmlformats.org/presentationml/2006/main" xmlns:r="http://schemas.openxmlformats.org/officeDocument/2006/relationships">
   <p:cSld>
     <p:spTree>
@@ -3879,7 +3995,7 @@
 </p:sld>
 </file>
 
-<file path=ppt/slides/slide8.xml><?xml version="1.0" encoding="utf-8"?>
+<file path=ppt/slides/slide9.xml><?xml version="1.0" encoding="utf-8"?>
 <p:sld xmlns:a="http://schemas.openxmlformats.org/drawingml/2006/main" xmlns:p="http://schemas.openxmlformats.org/presentationml/2006/main" xmlns:r="http://schemas.openxmlformats.org/officeDocument/2006/relationships">
   <p:cSld>
     <p:spTree>
@@ -3926,7 +4042,7 @@
           <a:lstStyle/>
           <a:p>
             <a:r>
-              <a:t>john@jmgundersen.com or https://jmgundersen.com</a:t>
+              <a:t>john@lindbakk.com or https://lindbakk.com</a:t>
             </a:r>
           </a:p>
         </p:txBody>

--- a/resume.pptx
+++ b/resume.pptx
@@ -4042,7 +4042,7 @@
           <a:lstStyle/>
           <a:p>
             <a:r>
-              <a:t>john@lindbakk.com or https://lindbakk.com</a:t>
+              <a:t>https://lindbakk.com</a:t>
             </a:r>
           </a:p>
         </p:txBody>
